--- a/templates.pptx
+++ b/templates.pptx
@@ -1611,6 +1611,46 @@
           </a:p>
         </p:txBody>
       </p:sp>
+      <p:sp>
+        <p:nvSpPr>
+          <p:cNvPr id="2" name="ZoneTexte 1">
+            <a:extLst>
+              <a:ext uri="{FF2B5EF4-FFF2-40B4-BE49-F238E27FC236}">
+                <a16:creationId xmlns:a16="http://schemas.microsoft.com/office/drawing/2014/main" id="{35F82752-8F02-D3AC-BEA9-2892C58FCF16}"/>
+              </a:ext>
+            </a:extLst>
+          </p:cNvPr>
+          <p:cNvSpPr txBox="1"/>
+          <p:nvPr/>
+        </p:nvSpPr>
+        <p:spPr>
+          <a:xfrm>
+            <a:off x="3359622" y="2598003"/>
+            <a:ext cx="5472753" cy="830997"/>
+          </a:xfrm>
+          <a:prstGeom prst="rect">
+            <a:avLst/>
+          </a:prstGeom>
+          <a:noFill/>
+        </p:spPr>
+        <p:txBody>
+          <a:bodyPr wrap="square" rtlCol="0">
+            <a:spAutoFit/>
+          </a:bodyPr>
+          <a:lstStyle/>
+          <a:p>
+            <a:pPr algn="ctr"/>
+            <a:r>
+              <a:rPr lang="fr-FR" sz="4800" dirty="0">
+                <a:solidFill>
+                  <a:schemeClr val="bg1"/>
+                </a:solidFill>
+              </a:rPr>
+              <a:t>{{TITLE_GENERAL}}</a:t>
+            </a:r>
+          </a:p>
+        </p:txBody>
+      </p:sp>
     </p:spTree>
     <p:extLst>
       <p:ext uri="{BB962C8B-B14F-4D97-AF65-F5344CB8AC3E}">
@@ -1781,6 +1821,46 @@
           </a:p>
         </p:txBody>
       </p:sp>
+      <p:sp>
+        <p:nvSpPr>
+          <p:cNvPr id="2" name="ZoneTexte 1">
+            <a:extLst>
+              <a:ext uri="{FF2B5EF4-FFF2-40B4-BE49-F238E27FC236}">
+                <a16:creationId xmlns:a16="http://schemas.microsoft.com/office/drawing/2014/main" id="{DF9C6885-E613-F8BB-57EC-BC2E7ECCF77E}"/>
+              </a:ext>
+            </a:extLst>
+          </p:cNvPr>
+          <p:cNvSpPr txBox="1"/>
+          <p:nvPr/>
+        </p:nvSpPr>
+        <p:spPr>
+          <a:xfrm>
+            <a:off x="3359622" y="2721114"/>
+            <a:ext cx="5472753" cy="707886"/>
+          </a:xfrm>
+          <a:prstGeom prst="rect">
+            <a:avLst/>
+          </a:prstGeom>
+          <a:noFill/>
+        </p:spPr>
+        <p:txBody>
+          <a:bodyPr wrap="square" rtlCol="0">
+            <a:spAutoFit/>
+          </a:bodyPr>
+          <a:lstStyle/>
+          <a:p>
+            <a:pPr algn="ctr"/>
+            <a:r>
+              <a:rPr lang="fr-FR" sz="4000" dirty="0">
+                <a:solidFill>
+                  <a:schemeClr val="bg1"/>
+                </a:solidFill>
+              </a:rPr>
+              <a:t>{{TITLE_SECTION}}</a:t>
+            </a:r>
+          </a:p>
+        </p:txBody>
+      </p:sp>
     </p:spTree>
     <p:extLst>
       <p:ext uri="{BB962C8B-B14F-4D97-AF65-F5344CB8AC3E}">
@@ -1939,6 +2019,46 @@
                 </a:solidFill>
               </a:rPr>
               <a:t>Dr Nathalie DUCRET</a:t>
+            </a:r>
+          </a:p>
+        </p:txBody>
+      </p:sp>
+      <p:sp>
+        <p:nvSpPr>
+          <p:cNvPr id="2" name="ZoneTexte 1">
+            <a:extLst>
+              <a:ext uri="{FF2B5EF4-FFF2-40B4-BE49-F238E27FC236}">
+                <a16:creationId xmlns:a16="http://schemas.microsoft.com/office/drawing/2014/main" id="{77A21637-D41F-728A-A923-B1A0461382A6}"/>
+              </a:ext>
+            </a:extLst>
+          </p:cNvPr>
+          <p:cNvSpPr txBox="1"/>
+          <p:nvPr/>
+        </p:nvSpPr>
+        <p:spPr>
+          <a:xfrm>
+            <a:off x="-2" y="38936"/>
+            <a:ext cx="3203380" cy="523220"/>
+          </a:xfrm>
+          <a:prstGeom prst="rect">
+            <a:avLst/>
+          </a:prstGeom>
+          <a:noFill/>
+        </p:spPr>
+        <p:txBody>
+          <a:bodyPr wrap="square" rtlCol="0">
+            <a:spAutoFit/>
+          </a:bodyPr>
+          <a:lstStyle/>
+          <a:p>
+            <a:pPr algn="ctr"/>
+            <a:r>
+              <a:rPr lang="fr-FR" sz="2800" dirty="0">
+                <a:solidFill>
+                  <a:srgbClr val="008080"/>
+                </a:solidFill>
+              </a:rPr>
+              <a:t>{{CONTENT_TITLE}}</a:t>
             </a:r>
           </a:p>
         </p:txBody>
